--- a/morning-registration-activities/the-last-five-mornings/downloads/The_Last_Five_Mornings.pptx
+++ b/morning-registration-activities/the-last-five-mornings/downloads/The_Last_Five_Mornings.pptx
@@ -3173,7 +3173,7 @@
                 <a:solidFill>
                   <a:srgbClr val="843347"/>
                 </a:solidFill>
-                <a:latin typeface="Karla"/>
+                <a:latin typeface="Calibri"/>
               </a:rPr>
               <a:t>MORNING REGISTRATION ACTIVITIES</a:t>
             </a:r>
@@ -3211,11 +3211,11 @@
               </a:spcAft>
             </a:pPr>
             <a:r>
-              <a:rPr sz="2700" b="1" i="0">
+              <a:rPr sz="2700" b="0" i="0">
                 <a:solidFill>
                   <a:srgbClr val="843347"/>
                 </a:solidFill>
-                <a:latin typeface="Libre Caslon Display"/>
+                <a:latin typeface="Georgia"/>
               </a:rPr>
               <a:t>The Last Five Mornings</a:t>
             </a:r>
@@ -3270,7 +3270,7 @@
                 <a:solidFill>
                   <a:srgbClr val="FFFDF7"/>
                 </a:solidFill>
-                <a:latin typeface="Karla"/>
+                <a:latin typeface="Calibri"/>
               </a:rPr>
               <a:t>THE LAST WEEK</a:t>
             </a:r>
@@ -3312,7 +3312,7 @@
                 <a:solidFill>
                   <a:srgbClr val="5C6552"/>
                 </a:solidFill>
-                <a:latin typeface="Karla"/>
+                <a:latin typeface="Calibri"/>
               </a:rPr>
               <a:t>Five mornings, five cards, and a last morning when they are read.</a:t>
             </a:r>
@@ -3462,11 +3462,11 @@
               </a:spcAft>
             </a:pPr>
             <a:r>
-              <a:rPr sz="1350" b="1" i="0">
+              <a:rPr sz="1350" b="0" i="0">
                 <a:solidFill>
                   <a:srgbClr val="843347"/>
                 </a:solidFill>
-                <a:latin typeface="Libre Caslon Display"/>
+                <a:latin typeface="Georgia"/>
               </a:rPr>
               <a:t>One card a morning</a:t>
             </a:r>
@@ -3508,7 +3508,7 @@
                 <a:solidFill>
                   <a:srgbClr val="5C6552"/>
                 </a:solidFill>
-                <a:latin typeface="Karla"/>
+                <a:latin typeface="Calibri"/>
               </a:rPr>
               <a:t>The prompt goes up, everyone writes a sentence or two, and the cards stay with the tutor.</a:t>
             </a:r>
@@ -3658,11 +3658,11 @@
               </a:spcAft>
             </a:pPr>
             <a:r>
-              <a:rPr sz="1350" b="1" i="0">
+              <a:rPr sz="1350" b="0" i="0">
                 <a:solidFill>
                   <a:srgbClr val="843347"/>
                 </a:solidFill>
-                <a:latin typeface="Libre Caslon Display"/>
+                <a:latin typeface="Georgia"/>
               </a:rPr>
               <a:t>Friday is written to the form</a:t>
             </a:r>
@@ -3704,7 +3704,7 @@
                 <a:solidFill>
                   <a:srgbClr val="5C6552"/>
                 </a:solidFill>
-                <a:latin typeface="Karla"/>
+                <a:latin typeface="Calibri"/>
               </a:rPr>
               <a:t>The last card is to everyone in the room, and it is the one that is always read out.</a:t>
             </a:r>
@@ -3854,11 +3854,11 @@
               </a:spcAft>
             </a:pPr>
             <a:r>
-              <a:rPr sz="1350" b="1" i="0">
+              <a:rPr sz="1350" b="0" i="0">
                 <a:solidFill>
                   <a:srgbClr val="843347"/>
                 </a:solidFill>
-                <a:latin typeface="Libre Caslon Display"/>
+                <a:latin typeface="Georgia"/>
               </a:rPr>
               <a:t>The last morning</a:t>
             </a:r>
@@ -3900,7 +3900,7 @@
                 <a:solidFill>
                   <a:srgbClr val="5C6552"/>
                 </a:solidFill>
-                <a:latin typeface="Karla"/>
+                <a:latin typeface="Calibri"/>
               </a:rPr>
               <a:t>The cards go back to whoever wrote them, and the reading takes as long as it takes.</a:t>
             </a:r>
@@ -3942,7 +3942,7 @@
                 <a:solidFill>
                   <a:srgbClr val="8B9179"/>
                 </a:solidFill>
-                <a:latin typeface="Karla"/>
+                <a:latin typeface="Calibri"/>
               </a:rPr>
               <a:t>Needs: the card sheet from the resource pack, one per student, cut into five.</a:t>
             </a:r>
@@ -4008,7 +4008,7 @@
                 <a:solidFill>
                   <a:srgbClr val="8B9179"/>
                 </a:solidFill>
-                <a:latin typeface="Karla"/>
+                <a:latin typeface="Calibri"/>
               </a:rPr>
               <a:t>The Pastoral Guide</a:t>
             </a:r>
@@ -4050,7 +4050,7 @@
                 <a:solidFill>
                   <a:srgbClr val="8B9179"/>
                 </a:solidFill>
-                <a:latin typeface="Karla"/>
+                <a:latin typeface="Calibri"/>
               </a:rPr>
               <a:t>1 / 7</a:t>
             </a:r>
@@ -4154,7 +4154,7 @@
                 <a:solidFill>
                   <a:srgbClr val="843347"/>
                 </a:solidFill>
-                <a:latin typeface="Karla"/>
+                <a:latin typeface="Calibri"/>
               </a:rPr>
               <a:t>THE LAST FIVE MORNINGS  ·  MONDAY</a:t>
             </a:r>
@@ -4282,11 +4282,11 @@
               </a:spcAft>
             </a:pPr>
             <a:r>
-              <a:rPr sz="2800" b="1" i="0">
+              <a:rPr sz="2800" b="0" i="0">
                 <a:solidFill>
                   <a:srgbClr val="843347"/>
                 </a:solidFill>
-                <a:latin typeface="Libre Caslon Display"/>
+                <a:latin typeface="Georgia"/>
               </a:rPr>
               <a:t>Something I am taking with me</a:t>
             </a:r>
@@ -4372,7 +4372,7 @@
                 <a:solidFill>
                   <a:srgbClr val="2E3436"/>
                 </a:solidFill>
-                <a:latin typeface="Karla"/>
+                <a:latin typeface="Calibri"/>
               </a:rPr>
               <a:t>A thing you learned here that was not on a syllabus.</a:t>
             </a:r>
@@ -4458,7 +4458,7 @@
                 <a:solidFill>
                   <a:srgbClr val="2E3436"/>
                 </a:solidFill>
-                <a:latin typeface="Karla"/>
+                <a:latin typeface="Calibri"/>
               </a:rPr>
               <a:t>A habit, a phrase, a way of doing something.</a:t>
             </a:r>
@@ -4544,7 +4544,7 @@
                 <a:solidFill>
                   <a:srgbClr val="2E3436"/>
                 </a:solidFill>
-                <a:latin typeface="Karla"/>
+                <a:latin typeface="Calibri"/>
               </a:rPr>
               <a:t>It does not have to be big.</a:t>
             </a:r>
@@ -4586,7 +4586,7 @@
                 <a:solidFill>
                   <a:srgbClr val="5C6552"/>
                 </a:solidFill>
-                <a:latin typeface="Karla"/>
+                <a:latin typeface="Calibri"/>
               </a:rPr>
               <a:t>A sentence or two on today’s card. Hand it to your tutor before the bell.</a:t>
             </a:r>
@@ -4652,7 +4652,7 @@
                 <a:solidFill>
                   <a:srgbClr val="8B9179"/>
                 </a:solidFill>
-                <a:latin typeface="Karla"/>
+                <a:latin typeface="Calibri"/>
               </a:rPr>
               <a:t>The Pastoral Guide</a:t>
             </a:r>
@@ -4694,7 +4694,7 @@
                 <a:solidFill>
                   <a:srgbClr val="8B9179"/>
                 </a:solidFill>
-                <a:latin typeface="Karla"/>
+                <a:latin typeface="Calibri"/>
               </a:rPr>
               <a:t>2 / 7</a:t>
             </a:r>
@@ -4798,7 +4798,7 @@
                 <a:solidFill>
                   <a:srgbClr val="843347"/>
                 </a:solidFill>
-                <a:latin typeface="Karla"/>
+                <a:latin typeface="Calibri"/>
               </a:rPr>
               <a:t>THE LAST FIVE MORNINGS  ·  TUESDAY</a:t>
             </a:r>
@@ -4926,11 +4926,11 @@
               </a:spcAft>
             </a:pPr>
             <a:r>
-              <a:rPr sz="2800" b="1" i="0">
+              <a:rPr sz="2800" b="0" i="0">
                 <a:solidFill>
                   <a:srgbClr val="843347"/>
                 </a:solidFill>
-                <a:latin typeface="Libre Caslon Display"/>
+                <a:latin typeface="Georgia"/>
               </a:rPr>
               <a:t>Somebody here I want to thank</a:t>
             </a:r>
@@ -5016,7 +5016,7 @@
                 <a:solidFill>
                   <a:srgbClr val="2E3436"/>
                 </a:solidFill>
-                <a:latin typeface="Karla"/>
+                <a:latin typeface="Calibri"/>
               </a:rPr>
               <a:t>Say who, and say what for.</a:t>
             </a:r>
@@ -5102,7 +5102,7 @@
                 <a:solidFill>
                   <a:srgbClr val="2E3436"/>
                 </a:solidFill>
-                <a:latin typeface="Karla"/>
+                <a:latin typeface="Calibri"/>
               </a:rPr>
               <a:t>It can be for one small thing on one day.</a:t>
             </a:r>
@@ -5188,7 +5188,7 @@
                 <a:solidFill>
                   <a:srgbClr val="2E3436"/>
                 </a:solidFill>
-                <a:latin typeface="Karla"/>
+                <a:latin typeface="Calibri"/>
               </a:rPr>
               <a:t>Nobody has to read this one out.</a:t>
             </a:r>
@@ -5230,7 +5230,7 @@
                 <a:solidFill>
                   <a:srgbClr val="5C6552"/>
                 </a:solidFill>
-                <a:latin typeface="Karla"/>
+                <a:latin typeface="Calibri"/>
               </a:rPr>
               <a:t>A sentence or two on today’s card. Hand it to your tutor before the bell.</a:t>
             </a:r>
@@ -5296,7 +5296,7 @@
                 <a:solidFill>
                   <a:srgbClr val="8B9179"/>
                 </a:solidFill>
-                <a:latin typeface="Karla"/>
+                <a:latin typeface="Calibri"/>
               </a:rPr>
               <a:t>The Pastoral Guide</a:t>
             </a:r>
@@ -5338,7 +5338,7 @@
                 <a:solidFill>
                   <a:srgbClr val="8B9179"/>
                 </a:solidFill>
-                <a:latin typeface="Karla"/>
+                <a:latin typeface="Calibri"/>
               </a:rPr>
               <a:t>3 / 7</a:t>
             </a:r>
@@ -5442,7 +5442,7 @@
                 <a:solidFill>
                   <a:srgbClr val="843347"/>
                 </a:solidFill>
-                <a:latin typeface="Karla"/>
+                <a:latin typeface="Calibri"/>
               </a:rPr>
               <a:t>THE LAST FIVE MORNINGS  ·  WEDNESDAY</a:t>
             </a:r>
@@ -5570,11 +5570,11 @@
               </a:spcAft>
             </a:pPr>
             <a:r>
-              <a:rPr sz="2800" b="1" i="0">
+              <a:rPr sz="2800" b="0" i="0">
                 <a:solidFill>
                   <a:srgbClr val="843347"/>
                 </a:solidFill>
-                <a:latin typeface="Libre Caslon Display"/>
+                <a:latin typeface="Georgia"/>
               </a:rPr>
               <a:t>What I would tell first-day me</a:t>
             </a:r>
@@ -5660,7 +5660,7 @@
                 <a:solidFill>
                   <a:srgbClr val="2E3436"/>
                 </a:solidFill>
-                <a:latin typeface="Karla"/>
+                <a:latin typeface="Calibri"/>
               </a:rPr>
               <a:t>One sentence to the person who walked in on day one.</a:t>
             </a:r>
@@ -5746,7 +5746,7 @@
                 <a:solidFill>
                   <a:srgbClr val="2E3436"/>
                 </a:solidFill>
-                <a:latin typeface="Karla"/>
+                <a:latin typeface="Calibri"/>
               </a:rPr>
               <a:t>Something you know now that you did not know then.</a:t>
             </a:r>
@@ -5832,7 +5832,7 @@
                 <a:solidFill>
                   <a:srgbClr val="2E3436"/>
                 </a:solidFill>
-                <a:latin typeface="Karla"/>
+                <a:latin typeface="Calibri"/>
               </a:rPr>
               <a:t>Kind, if you can manage it.</a:t>
             </a:r>
@@ -5874,7 +5874,7 @@
                 <a:solidFill>
                   <a:srgbClr val="5C6552"/>
                 </a:solidFill>
-                <a:latin typeface="Karla"/>
+                <a:latin typeface="Calibri"/>
               </a:rPr>
               <a:t>A sentence or two on today’s card. Hand it to your tutor before the bell.</a:t>
             </a:r>
@@ -5940,7 +5940,7 @@
                 <a:solidFill>
                   <a:srgbClr val="8B9179"/>
                 </a:solidFill>
-                <a:latin typeface="Karla"/>
+                <a:latin typeface="Calibri"/>
               </a:rPr>
               <a:t>The Pastoral Guide</a:t>
             </a:r>
@@ -5982,7 +5982,7 @@
                 <a:solidFill>
                   <a:srgbClr val="8B9179"/>
                 </a:solidFill>
-                <a:latin typeface="Karla"/>
+                <a:latin typeface="Calibri"/>
               </a:rPr>
               <a:t>4 / 7</a:t>
             </a:r>
@@ -6086,7 +6086,7 @@
                 <a:solidFill>
                   <a:srgbClr val="843347"/>
                 </a:solidFill>
-                <a:latin typeface="Karla"/>
+                <a:latin typeface="Calibri"/>
               </a:rPr>
               <a:t>THE LAST FIVE MORNINGS  ·  THURSDAY</a:t>
             </a:r>
@@ -6214,11 +6214,11 @@
               </a:spcAft>
             </a:pPr>
             <a:r>
-              <a:rPr sz="2800" b="1" i="0">
+              <a:rPr sz="2800" b="0" i="0">
                 <a:solidFill>
                   <a:srgbClr val="843347"/>
                 </a:solidFill>
-                <a:latin typeface="Libre Caslon Display"/>
+                <a:latin typeface="Georgia"/>
               </a:rPr>
               <a:t>Something I will not miss</a:t>
             </a:r>
@@ -6304,7 +6304,7 @@
                 <a:solidFill>
                   <a:srgbClr val="2E3436"/>
                 </a:solidFill>
-                <a:latin typeface="Karla"/>
+                <a:latin typeface="Calibri"/>
               </a:rPr>
               <a:t>A subject, a room, a corridor, a rule, a bus.</a:t>
             </a:r>
@@ -6390,7 +6390,7 @@
                 <a:solidFill>
                   <a:srgbClr val="2E3436"/>
                 </a:solidFill>
-                <a:latin typeface="Karla"/>
+                <a:latin typeface="Calibri"/>
               </a:rPr>
               <a:t>Keep it to things, not people.</a:t>
             </a:r>
@@ -6476,7 +6476,7 @@
                 <a:solidFill>
                   <a:srgbClr val="2E3436"/>
                 </a:solidFill>
-                <a:latin typeface="Karla"/>
+                <a:latin typeface="Calibri"/>
               </a:rPr>
               <a:t>You are allowed to be glad about it.</a:t>
             </a:r>
@@ -6518,7 +6518,7 @@
                 <a:solidFill>
                   <a:srgbClr val="5C6552"/>
                 </a:solidFill>
-                <a:latin typeface="Karla"/>
+                <a:latin typeface="Calibri"/>
               </a:rPr>
               <a:t>A sentence or two on today’s card. Hand it to your tutor before the bell.</a:t>
             </a:r>
@@ -6584,7 +6584,7 @@
                 <a:solidFill>
                   <a:srgbClr val="8B9179"/>
                 </a:solidFill>
-                <a:latin typeface="Karla"/>
+                <a:latin typeface="Calibri"/>
               </a:rPr>
               <a:t>The Pastoral Guide</a:t>
             </a:r>
@@ -6626,7 +6626,7 @@
                 <a:solidFill>
                   <a:srgbClr val="8B9179"/>
                 </a:solidFill>
-                <a:latin typeface="Karla"/>
+                <a:latin typeface="Calibri"/>
               </a:rPr>
               <a:t>5 / 7</a:t>
             </a:r>
@@ -6730,7 +6730,7 @@
                 <a:solidFill>
                   <a:srgbClr val="843347"/>
                 </a:solidFill>
-                <a:latin typeface="Karla"/>
+                <a:latin typeface="Calibri"/>
               </a:rPr>
               <a:t>THE LAST FIVE MORNINGS  ·  FRIDAY</a:t>
             </a:r>
@@ -6858,11 +6858,11 @@
               </a:spcAft>
             </a:pPr>
             <a:r>
-              <a:rPr sz="2800" b="1" i="0">
+              <a:rPr sz="2800" b="0" i="0">
                 <a:solidFill>
                   <a:srgbClr val="843347"/>
                 </a:solidFill>
-                <a:latin typeface="Libre Caslon Display"/>
+                <a:latin typeface="Georgia"/>
               </a:rPr>
               <a:t>To this form</a:t>
             </a:r>
@@ -6948,7 +6948,7 @@
                 <a:solidFill>
                   <a:srgbClr val="2E3436"/>
                 </a:solidFill>
-                <a:latin typeface="Karla"/>
+                <a:latin typeface="Calibri"/>
               </a:rPr>
               <a:t>One or two sentences to everyone in the room.</a:t>
             </a:r>
@@ -7034,7 +7034,7 @@
                 <a:solidFill>
                   <a:srgbClr val="2E3436"/>
                 </a:solidFill>
-                <a:latin typeface="Karla"/>
+                <a:latin typeface="Calibri"/>
               </a:rPr>
               <a:t>This is the card that gets read out.</a:t>
             </a:r>
@@ -7120,7 +7120,7 @@
                 <a:solidFill>
                   <a:srgbClr val="2E3436"/>
                 </a:solidFill>
-                <a:latin typeface="Karla"/>
+                <a:latin typeface="Calibri"/>
               </a:rPr>
               <a:t>Write it as if you mean it, because you do.</a:t>
             </a:r>
@@ -7162,7 +7162,7 @@
                 <a:solidFill>
                   <a:srgbClr val="5C6552"/>
                 </a:solidFill>
-                <a:latin typeface="Karla"/>
+                <a:latin typeface="Calibri"/>
               </a:rPr>
               <a:t>A sentence or two on today’s card. Hand it to your tutor before the bell.</a:t>
             </a:r>
@@ -7228,7 +7228,7 @@
                 <a:solidFill>
                   <a:srgbClr val="8B9179"/>
                 </a:solidFill>
-                <a:latin typeface="Karla"/>
+                <a:latin typeface="Calibri"/>
               </a:rPr>
               <a:t>The Pastoral Guide</a:t>
             </a:r>
@@ -7270,7 +7270,7 @@
                 <a:solidFill>
                   <a:srgbClr val="8B9179"/>
                 </a:solidFill>
-                <a:latin typeface="Karla"/>
+                <a:latin typeface="Calibri"/>
               </a:rPr>
               <a:t>6 / 7</a:t>
             </a:r>
@@ -7374,7 +7374,7 @@
                 <a:solidFill>
                   <a:srgbClr val="843347"/>
                 </a:solidFill>
-                <a:latin typeface="Karla"/>
+                <a:latin typeface="Calibri"/>
               </a:rPr>
               <a:t>THE LAST FIVE MORNINGS  ·  THE LAST MORNING</a:t>
             </a:r>
@@ -7436,11 +7436,11 @@
               </a:spcAft>
             </a:pPr>
             <a:r>
-              <a:rPr sz="3200" b="1" i="0">
+              <a:rPr sz="3200" b="0" i="0">
                 <a:solidFill>
                   <a:srgbClr val="843347"/>
                 </a:solidFill>
-                <a:latin typeface="Libre Caslon Display"/>
+                <a:latin typeface="Georgia"/>
               </a:rPr>
               <a:t>Read them out</a:t>
             </a:r>
@@ -7482,7 +7482,7 @@
                 <a:solidFill>
                   <a:srgbClr val="5C6552"/>
                 </a:solidFill>
-                <a:latin typeface="Karla"/>
+                <a:latin typeface="Calibri"/>
               </a:rPr>
               <a:t>The cards come back. Read your Friday card, and any of the others you want to. If you would rather not read, hand it to your tutor and they will.</a:t>
             </a:r>
@@ -7524,7 +7524,7 @@
                 <a:solidFill>
                   <a:srgbClr val="8B9179"/>
                 </a:solidFill>
-                <a:latin typeface="Karla"/>
+                <a:latin typeface="Calibri"/>
               </a:rPr>
               <a:t>Then that is the form. Thank you for being in it.</a:t>
             </a:r>
@@ -7590,7 +7590,7 @@
                 <a:solidFill>
                   <a:srgbClr val="8B9179"/>
                 </a:solidFill>
-                <a:latin typeface="Karla"/>
+                <a:latin typeface="Calibri"/>
               </a:rPr>
               <a:t>The Pastoral Guide</a:t>
             </a:r>
@@ -7632,7 +7632,7 @@
                 <a:solidFill>
                   <a:srgbClr val="8B9179"/>
                 </a:solidFill>
-                <a:latin typeface="Karla"/>
+                <a:latin typeface="Calibri"/>
               </a:rPr>
               <a:t>7 / 7</a:t>
             </a:r>
